--- a/carpentry/intake-142/PowerPoint/Day-07_2026-11-06_Week-2.pptx
+++ b/carpentry/intake-142/PowerPoint/Day-07_2026-11-06_Week-2.pptx
@@ -687,7 +687,7 @@
           <a:p/>
           <a:p>
             <a:r>
-              <a:t>Open the textbook to Chapter 4, pages 56–63. Today we will take a dimension written in inches and place it accurately on a paper strip. This is the same connection we need between a drawing and a piece of material. What could go wrong even if we read the fraction correctly? Starting the rule at the wrong point would shift the mark. We will deliberately check the start point, the whole inches, and the fractional spaces as separate parts of the job.</a:t>
+              <a:t>Open the textbook to Chapter 4, pages 88–96. Today we will take a dimension written in inches and place it accurately on a paper strip. This is the same connection we need between a drawing and a piece of material. What could go wrong even if we read the fraction correctly? Starting the rule at the wrong point would shift the mark. We will deliberately check the start point, the whole inches, and the fractional spaces as separate parts of the job.</a:t>
             </a:r>
           </a:p>
         </p:txBody>
@@ -991,7 +991,7 @@
           <a:p/>
           <a:p>
             <a:r>
-              <a:t>Figure 4.3 on page 57 shows how a dimension reading relates to the ruler's subdivisions. Look first for the preceding whole-inch mark, then identify the size of the small intervals. That establishes the denominator before we count the numerator. How would you transfer a reading from this illustration to your paper? Write the full reading, place your own rule at zero, and reconstruct that measurement using your rule. We are transferring information, not tracing the picture's physical width. That distinction matters whenever drawings are printed, projected, or resized on a screen.</a:t>
+              <a:t>Figure 4.3 on page 89 shows how a dimension reading relates to the ruler's subdivisions. Look first for the preceding whole-inch mark, then identify the size of the small intervals. That establishes the denominator before we count the numerator. How would you transfer a reading from this illustration to your paper? Write the full reading, place your own rule at zero, and reconstruct that measurement using your rule. We are transferring information, not tracing the picture's physical width. That distinction matters whenever drawings are printed, projected, or resized on a screen.</a:t>
             </a:r>
           </a:p>
         </p:txBody>
@@ -1067,7 +1067,7 @@
           <a:p/>
           <a:p>
             <a:r>
-              <a:t>Use the steps on page 57 to reread a mark systematically. Locate the last whole inch before the mark. Determine how many equal spaces divide the next inch. Count from the whole-inch position to the mark, then simplify the fraction if possible. Why not start by naming a familiar-looking tick? Tick lengths vary among rules, and a rushed guess can hide a whole-inch error. The sequence gives us a reproducible reading. Ask your partner to say both the unsimplified fraction and its simplest form when the count can be reduced; the endpoint must remain identical.</a:t>
+              <a:t>Use the steps on page 89 to reread a mark systematically. Locate the last whole inch before the mark. Determine how many equal spaces divide the next inch. Count from the whole-inch position to the mark, then simplify the fraction if possible. Why not start by naming a familiar-looking tick? Tick lengths vary among rules, and a rushed guess can hide a whole-inch error. The sequence gives us a reproducible reading. Ask your partner to say both the unsimplified fraction and its simplest form when the count can be reduced; the endpoint must remain identical.</a:t>
             </a:r>
           </a:p>
         </p:txBody>
@@ -2073,7 +2073,7 @@
           <a:p/>
           <a:p>
             <a:r>
-              <a:t>This block checks the foundations we need before fraction operations. You will read ruler marks, simplify fractions, compare lengths, and convert number forms. The goal is to see which steps you can carry out independently and which need more practice. Why keep working even when the answer seems obvious? It lets us distinguish a reading error from a conversion error. Use the textbook on pages 56–63 during the review; the independent attempt comes before checking the answers.</a:t>
+              <a:t>This block checks the foundations we need before fraction operations. You will read ruler marks, simplify fractions, compare lengths, and convert number forms. The goal is to see which steps you can carry out independently and which need more practice. Why keep working even when the answer seems obvious? It lets us distinguish a reading error from a conversion error. Use the textbook on pages 88–96 during the review; the independent attempt comes before checking the answers.</a:t>
             </a:r>
           </a:p>
         </p:txBody>
@@ -2377,7 +2377,7 @@
           <a:p/>
           <a:p>
             <a:r>
-              <a:t>On page 61, follow the preparation example for comparing and ordering dimensions. Identify where the fractions are renamed so their parts have the same size. Then read the ordering from the shared-unit values, not from the original numerators alone. If two labels have different denominators, what must we know before comparing their numerators? We need a common denominator. Keep this example separate from your checkpoint answers: its purpose is to remind you of the method. On your own questions, you will choose the appropriate denominator and show the conversions yourself.</a:t>
+              <a:t>On page 94, follow the preparation example for comparing and ordering dimensions. Identify where the fractions are renamed so their parts have the same size. Then read the ordering from the shared-unit values, not from the original numerators alone. If two labels have different denominators, what must we know before comparing their numerators? We need a common denominator. Keep this example separate from your checkpoint answers: its purpose is to remind you of the method. On your own questions, you will choose the appropriate denominator and show the conversions yourself.</a:t>
             </a:r>
           </a:p>
         </p:txBody>
@@ -4941,7 +4941,7 @@
                 </a:solidFill>
                 <a:latin typeface="Arial"/>
               </a:rPr>
-              <a:t>Textbook Chapter 4 pp.56–63</a:t>
+              <a:t>Textbook Chapter 4 pp.88–96</a:t>
             </a:r>
           </a:p>
         </p:txBody>
@@ -5699,7 +5699,7 @@
                 </a:solidFill>
                 <a:latin typeface="Arial"/>
               </a:rPr>
-              <a:t>Textbook Chapter 4 pp.56–63</a:t>
+              <a:t>Textbook Chapter 4 pp.88–96</a:t>
             </a:r>
           </a:p>
         </p:txBody>
@@ -5899,7 +5899,7 @@
                 </a:solidFill>
                 <a:latin typeface="Arial"/>
               </a:rPr>
-              <a:t>Resources: Exercise Book 4A Q3 (p.25), Q8–11 (p.26)</a:t>
+              <a:t>Resources: Exercise Book 4A Q3 (p.35), Q8–11 (p.36)</a:t>
             </a:r>
           </a:p>
         </p:txBody>
@@ -6513,7 +6513,7 @@
                 </a:solidFill>
                 <a:latin typeface="Arial"/>
               </a:rPr>
-              <a:t>Textbook Chapter 4 pp.56–63</a:t>
+              <a:t>Textbook Chapter 4 pp.88–96</a:t>
             </a:r>
           </a:p>
         </p:txBody>
@@ -7244,7 +7244,7 @@
                 </a:solidFill>
                 <a:latin typeface="Arial"/>
               </a:rPr>
-              <a:t>Textbook Chapter 4 pp.56–63</a:t>
+              <a:t>Textbook Chapter 4 pp.88–96</a:t>
             </a:r>
           </a:p>
         </p:txBody>
@@ -7978,7 +7978,7 @@
                 </a:solidFill>
                 <a:latin typeface="Arial"/>
               </a:rPr>
-              <a:t>Textbook Chapter 4 pp.56–63</a:t>
+              <a:t>Textbook Chapter 4 pp.88–96</a:t>
             </a:r>
           </a:p>
         </p:txBody>
@@ -8178,7 +8178,7 @@
                 </a:solidFill>
                 <a:latin typeface="Arial"/>
               </a:rPr>
-              <a:t>Resources: Exercise Book 4A Q3 (p.25), Q8–11 (p.26)</a:t>
+              <a:t>Resources: Exercise Book 4A Q3 (p.35), Q8–11 (p.36)</a:t>
             </a:r>
           </a:p>
         </p:txBody>
@@ -8792,7 +8792,7 @@
                 </a:solidFill>
                 <a:latin typeface="Arial"/>
               </a:rPr>
-              <a:t>Textbook Chapter 4 pp.56–63</a:t>
+              <a:t>Textbook Chapter 4 pp.88–96</a:t>
             </a:r>
           </a:p>
         </p:txBody>
@@ -9568,7 +9568,7 @@
                 </a:solidFill>
                 <a:latin typeface="Arial"/>
               </a:rPr>
-              <a:t>Textbook Chapter 4 pp.56–63</a:t>
+              <a:t>Textbook Chapter 4 pp.88–96</a:t>
             </a:r>
           </a:p>
         </p:txBody>
@@ -10527,7 +10527,7 @@
                 </a:solidFill>
                 <a:latin typeface="Arial"/>
               </a:rPr>
-              <a:t>Textbook Chapter 4 pp.56–63</a:t>
+              <a:t>Textbook Chapter 4 pp.88–96</a:t>
             </a:r>
           </a:p>
         </p:txBody>
@@ -11213,7 +11213,7 @@
                 </a:solidFill>
                 <a:latin typeface="Arial"/>
               </a:rPr>
-              <a:t>Textbook Chapter 4 pp.56–63</a:t>
+              <a:t>Textbook Chapter 4 pp.88–96</a:t>
             </a:r>
           </a:p>
         </p:txBody>
@@ -11899,7 +11899,7 @@
                 </a:solidFill>
                 <a:latin typeface="Arial"/>
               </a:rPr>
-              <a:t>Textbook Chapter 4 pp.56–63</a:t>
+              <a:t>Textbook Chapter 4 pp.88–96</a:t>
             </a:r>
           </a:p>
         </p:txBody>
@@ -12099,7 +12099,7 @@
                 </a:solidFill>
                 <a:latin typeface="Arial"/>
               </a:rPr>
-              <a:t>Resources: Exercise Book 4A Q3 (p.25), Q8–11 (p.26)</a:t>
+              <a:t>Resources: Exercise Book 4A Q3 (p.35), Q8–11 (p.36)</a:t>
             </a:r>
           </a:p>
         </p:txBody>
@@ -16065,7 +16065,7 @@
                 </a:solidFill>
                 <a:latin typeface="Arial"/>
               </a:rPr>
-              <a:t>Textbook Chapter 4 pp.56–63</a:t>
+              <a:t>Textbook Chapter 4 pp.88–96</a:t>
             </a:r>
           </a:p>
         </p:txBody>
@@ -16265,7 +16265,7 @@
                 </a:solidFill>
                 <a:latin typeface="Arial"/>
               </a:rPr>
-              <a:t>Resources: Exercise Book 4A Q3 (p.25), Q8–11 (p.26)</a:t>
+              <a:t>Resources: Exercise Book 4A Q3 (p.35), Q8–11 (p.36)</a:t>
             </a:r>
           </a:p>
         </p:txBody>
@@ -17544,7 +17544,7 @@
                 </a:solidFill>
                 <a:latin typeface="Arial"/>
               </a:rPr>
-              <a:t>Textbook Chapter 4 pp.56–63</a:t>
+              <a:t>Textbook Chapter 4 pp.88–96</a:t>
             </a:r>
           </a:p>
         </p:txBody>
@@ -17744,7 +17744,7 @@
                 </a:solidFill>
                 <a:latin typeface="Arial"/>
               </a:rPr>
-              <a:t>Textbook Chapter 4 pp.56–63</a:t>
+              <a:t>Textbook Chapter 4 pp.88–96</a:t>
             </a:r>
           </a:p>
         </p:txBody>
@@ -17792,7 +17792,7 @@
                 </a:solidFill>
                 <a:latin typeface="Arial"/>
               </a:rPr>
-              <a:t>Exercise Book 4A Q3,6,8,10–11 (pp.25–26)</a:t>
+              <a:t>Exercise Book 4A Q3,6,8,10–11 (pp.35–36)</a:t>
             </a:r>
           </a:p>
         </p:txBody>
@@ -18454,7 +18454,7 @@
                 </a:solidFill>
                 <a:latin typeface="Arial"/>
               </a:rPr>
-              <a:t>Textbook Chapter 4 pp.56–63</a:t>
+              <a:t>Textbook Chapter 4 pp.88–96</a:t>
             </a:r>
           </a:p>
         </p:txBody>
@@ -18654,7 +18654,7 @@
                 </a:solidFill>
                 <a:latin typeface="Arial"/>
               </a:rPr>
-              <a:t>Resources: Exercise Book 4A Q3,6,8,10–11 (pp.25–26)</a:t>
+              <a:t>Resources: Exercise Book 4A Q3,6,8,10–11 (pp.35–36)</a:t>
             </a:r>
           </a:p>
         </p:txBody>
@@ -19403,7 +19403,7 @@
                 </a:solidFill>
                 <a:latin typeface="Arial"/>
               </a:rPr>
-              <a:t>Textbook Chapter 4 pp.56–63</a:t>
+              <a:t>Textbook Chapter 4 pp.88–96</a:t>
             </a:r>
           </a:p>
         </p:txBody>
@@ -20624,7 +20624,7 @@
                 </a:solidFill>
                 <a:latin typeface="Arial"/>
               </a:rPr>
-              <a:t>Textbook Chapter 4 pp.56–63</a:t>
+              <a:t>Textbook Chapter 4 pp.88–96</a:t>
             </a:r>
           </a:p>
         </p:txBody>
@@ -22466,7 +22466,7 @@
                 </a:solidFill>
                 <a:latin typeface="Arial"/>
               </a:rPr>
-              <a:t>Textbook  |  page 61</a:t>
+              <a:t>Textbook  |  page 94</a:t>
             </a:r>
           </a:p>
         </p:txBody>
@@ -22514,7 +22514,7 @@
                 </a:solidFill>
                 <a:latin typeface="Arial"/>
               </a:rPr>
-              <a:t>Textbook Chapter 4 pp.56–63</a:t>
+              <a:t>Textbook Chapter 4 pp.88–96</a:t>
             </a:r>
           </a:p>
         </p:txBody>
@@ -22586,7 +22586,7 @@
                 </a:solidFill>
                 <a:latin typeface="Arial"/>
               </a:rPr>
-              <a:t>Textbook p.61 · Different-number preparation: compare and order sizes.</a:t>
+              <a:t>Textbook p.94 · Different-number preparation: compare and order sizes.</a:t>
             </a:r>
           </a:p>
         </p:txBody>
@@ -23152,7 +23152,7 @@
                 </a:solidFill>
                 <a:latin typeface="Arial"/>
               </a:rPr>
-              <a:t>Textbook  |  page 61</a:t>
+              <a:t>Textbook  |  page 94</a:t>
             </a:r>
           </a:p>
         </p:txBody>
@@ -23200,7 +23200,7 @@
                 </a:solidFill>
                 <a:latin typeface="Arial"/>
               </a:rPr>
-              <a:t>Textbook Chapter 4 pp.56–63</a:t>
+              <a:t>Textbook Chapter 4 pp.88–96</a:t>
             </a:r>
           </a:p>
         </p:txBody>
@@ -23272,7 +23272,7 @@
                 </a:solidFill>
                 <a:latin typeface="Arial"/>
               </a:rPr>
-              <a:t>Textbook p.61 · Figure 4.8: eleven quarters are two wholes and three quarters.</a:t>
+              <a:t>Textbook p.94 · Figure 4.8: eleven quarters are two wholes and three quarters.</a:t>
             </a:r>
           </a:p>
         </p:txBody>
@@ -23886,7 +23886,7 @@
                 </a:solidFill>
                 <a:latin typeface="Arial"/>
               </a:rPr>
-              <a:t>Textbook Chapter 4 pp.56–63</a:t>
+              <a:t>Textbook Chapter 4 pp.88–96</a:t>
             </a:r>
           </a:p>
         </p:txBody>
@@ -24599,7 +24599,7 @@
                 </a:solidFill>
                 <a:latin typeface="Arial"/>
               </a:rPr>
-              <a:t>Textbook Chapter 4 pp.56–63</a:t>
+              <a:t>Textbook Chapter 4 pp.88–96</a:t>
             </a:r>
           </a:p>
         </p:txBody>
@@ -24799,7 +24799,7 @@
                 </a:solidFill>
                 <a:latin typeface="Arial"/>
               </a:rPr>
-              <a:t>Textbook Chapter 4 pp.56–63</a:t>
+              <a:t>Textbook Chapter 4 pp.88–96</a:t>
             </a:r>
           </a:p>
         </p:txBody>
@@ -24847,7 +24847,7 @@
                 </a:solidFill>
                 <a:latin typeface="Arial"/>
               </a:rPr>
-              <a:t>Exercise Book 4A Q3 (p.25), Q8–11 (p.26)</a:t>
+              <a:t>Exercise Book 4A Q3 (p.35), Q8–11 (p.36)</a:t>
             </a:r>
           </a:p>
         </p:txBody>
@@ -25509,7 +25509,7 @@
                 </a:solidFill>
                 <a:latin typeface="Arial"/>
               </a:rPr>
-              <a:t>Textbook Chapter 4 pp.56–63</a:t>
+              <a:t>Textbook Chapter 4 pp.88–96</a:t>
             </a:r>
           </a:p>
         </p:txBody>
@@ -25709,7 +25709,7 @@
                 </a:solidFill>
                 <a:latin typeface="Arial"/>
               </a:rPr>
-              <a:t>Resources: Exercise Book 4A Q3,6,8,10–11 (pp.25–26)</a:t>
+              <a:t>Resources: Exercise Book 4A Q3,6,8,10–11 (pp.35–36)</a:t>
             </a:r>
           </a:p>
         </p:txBody>
@@ -26323,7 +26323,7 @@
                 </a:solidFill>
                 <a:latin typeface="Arial"/>
               </a:rPr>
-              <a:t>Textbook Chapter 4 pp.56–63</a:t>
+              <a:t>Textbook Chapter 4 pp.88–96</a:t>
             </a:r>
           </a:p>
         </p:txBody>
@@ -26523,7 +26523,7 @@
                 </a:solidFill>
                 <a:latin typeface="Arial"/>
               </a:rPr>
-              <a:t>Resources: Exercise Book 4A Q3,6,8,10–11 (pp.25–26)</a:t>
+              <a:t>Resources: Exercise Book 4A Q3,6,8,10–11 (pp.35–36)</a:t>
             </a:r>
           </a:p>
         </p:txBody>
@@ -27137,7 +27137,7 @@
                 </a:solidFill>
                 <a:latin typeface="Arial"/>
               </a:rPr>
-              <a:t>Textbook Chapter 4 pp.56–63</a:t>
+              <a:t>Textbook Chapter 4 pp.88–96</a:t>
             </a:r>
           </a:p>
         </p:txBody>
@@ -27913,7 +27913,7 @@
                 </a:solidFill>
                 <a:latin typeface="Arial"/>
               </a:rPr>
-              <a:t>Textbook Chapter 4 pp.56–63</a:t>
+              <a:t>Textbook Chapter 4 pp.88–96</a:t>
             </a:r>
           </a:p>
         </p:txBody>
@@ -28872,7 +28872,7 @@
                 </a:solidFill>
                 <a:latin typeface="Arial"/>
               </a:rPr>
-              <a:t>Textbook Chapter 4 pp.56–63</a:t>
+              <a:t>Textbook Chapter 4 pp.88–96</a:t>
             </a:r>
           </a:p>
         </p:txBody>
@@ -29558,7 +29558,7 @@
                 </a:solidFill>
                 <a:latin typeface="Arial"/>
               </a:rPr>
-              <a:t>Textbook Chapter 4 pp.56–63</a:t>
+              <a:t>Textbook Chapter 4 pp.88–96</a:t>
             </a:r>
           </a:p>
         </p:txBody>
@@ -30269,7 +30269,7 @@
                 </a:solidFill>
                 <a:latin typeface="Arial"/>
               </a:rPr>
-              <a:t>Textbook Chapter 4 pp.56–63</a:t>
+              <a:t>Textbook Chapter 4 pp.88–96</a:t>
             </a:r>
           </a:p>
         </p:txBody>
@@ -30469,7 +30469,7 @@
                 </a:solidFill>
                 <a:latin typeface="Arial"/>
               </a:rPr>
-              <a:t>Resources: Exercise Book 4A Q3,6,8,10–11 (pp.25–26)</a:t>
+              <a:t>Resources: Exercise Book 4A Q3,6,8,10–11 (pp.35–36)</a:t>
             </a:r>
           </a:p>
         </p:txBody>
@@ -31083,7 +31083,7 @@
                 </a:solidFill>
                 <a:latin typeface="Arial"/>
               </a:rPr>
-              <a:t>Textbook Chapter 4 pp.56–63</a:t>
+              <a:t>Textbook Chapter 4 pp.88–96</a:t>
             </a:r>
           </a:p>
         </p:txBody>
@@ -31283,7 +31283,7 @@
                 </a:solidFill>
                 <a:latin typeface="Arial"/>
               </a:rPr>
-              <a:t>Resources: Exercise Book 4A Q3,6,8,10–11 (pp.25–26)</a:t>
+              <a:t>Resources: Exercise Book 4A Q3,6,8,10–11 (pp.35–36)</a:t>
             </a:r>
           </a:p>
         </p:txBody>
@@ -31897,7 +31897,7 @@
                 </a:solidFill>
                 <a:latin typeface="Arial"/>
               </a:rPr>
-              <a:t>Textbook Chapter 4 pp.56–63</a:t>
+              <a:t>Textbook Chapter 4 pp.88–96</a:t>
             </a:r>
           </a:p>
         </p:txBody>
@@ -32097,7 +32097,7 @@
                 </a:solidFill>
                 <a:latin typeface="Arial"/>
               </a:rPr>
-              <a:t>Resources: Exercise Book 4A Q3 (p.25), Q8–11 (p.26)</a:t>
+              <a:t>Resources: Exercise Book 4A Q3 (p.35), Q8–11 (p.36)</a:t>
             </a:r>
           </a:p>
         </p:txBody>
@@ -32846,7 +32846,7 @@
                 </a:solidFill>
                 <a:latin typeface="Arial"/>
               </a:rPr>
-              <a:t>Textbook Chapter 4 pp.56–63</a:t>
+              <a:t>Textbook Chapter 4 pp.88–96</a:t>
             </a:r>
           </a:p>
         </p:txBody>
@@ -34067,7 +34067,7 @@
                 </a:solidFill>
                 <a:latin typeface="Arial"/>
               </a:rPr>
-              <a:t>Textbook Chapter 4 pp.56–63</a:t>
+              <a:t>Textbook Chapter 4 pp.88–96</a:t>
             </a:r>
           </a:p>
         </p:txBody>
@@ -35926,7 +35926,7 @@
                 </a:solidFill>
                 <a:latin typeface="Arial"/>
               </a:rPr>
-              <a:t>Textbook  |  page 57</a:t>
+              <a:t>Textbook  |  page 89</a:t>
             </a:r>
           </a:p>
         </p:txBody>
@@ -35974,7 +35974,7 @@
                 </a:solidFill>
                 <a:latin typeface="Arial"/>
               </a:rPr>
-              <a:t>Textbook Chapter 4 pp.56–63</a:t>
+              <a:t>Textbook Chapter 4 pp.88–96</a:t>
             </a:r>
           </a:p>
         </p:txBody>
@@ -36046,7 +36046,7 @@
                 </a:solidFill>
                 <a:latin typeface="Arial"/>
               </a:rPr>
-              <a:t>Textbook p.57 · Figure 4.3: transfer the written measurement, not the screen size.</a:t>
+              <a:t>Textbook p.89 · Figure 4.3: transfer the written measurement, not the screen size.</a:t>
             </a:r>
           </a:p>
         </p:txBody>
@@ -36612,7 +36612,7 @@
                 </a:solidFill>
                 <a:latin typeface="Arial"/>
               </a:rPr>
-              <a:t>Textbook  |  page 57</a:t>
+              <a:t>Textbook  |  page 89</a:t>
             </a:r>
           </a:p>
         </p:txBody>
@@ -36660,7 +36660,7 @@
                 </a:solidFill>
                 <a:latin typeface="Arial"/>
               </a:rPr>
-              <a:t>Textbook Chapter 4 pp.56–63</a:t>
+              <a:t>Textbook Chapter 4 pp.88–96</a:t>
             </a:r>
           </a:p>
         </p:txBody>
@@ -36732,7 +36732,7 @@
                 </a:solidFill>
                 <a:latin typeface="Arial"/>
               </a:rPr>
-              <a:t>Textbook p.57 · Four steps for rereading a mark from the last whole inch.</a:t>
+              <a:t>Textbook p.89 · Four steps for rereading a mark from the last whole inch.</a:t>
             </a:r>
           </a:p>
         </p:txBody>

--- a/carpentry/intake-142/PowerPoint/Day-07_2026-11-06_Week-2.pptx
+++ b/carpentry/intake-142/PowerPoint/Day-07_2026-11-06_Week-2.pptx
@@ -16538,6 +16538,104 @@
           </a:p>
         </p:txBody>
       </p:sp>
+      <p:sp>
+        <p:nvSpPr>
+          <p:cNvPr id="22" name="Play quiz W02-L09"/>
+          <p:cNvSpPr txBox="1"/>
+          <p:nvPr/>
+        </p:nvSpPr>
+        <p:spPr>
+          <a:xfrm>
+            <a:off x="6355080" y="6606540"/>
+            <a:ext cx="822960" cy="210312"/>
+          </a:xfrm>
+          <a:prstGeom prst="rect">
+            <a:avLst/>
+          </a:prstGeom>
+          <a:noFill/>
+        </p:spPr>
+        <p:txBody>
+          <a:bodyPr wrap="square" lIns="0" rIns="0" tIns="0" bIns="0" anchor="t">
+            <a:normAutofit fontScale="100000" lnSpcReduction="0"/>
+          </a:bodyPr>
+          <a:lstStyle/>
+          <a:p>
+            <a:pPr>
+              <a:spcBef>
+                <a:spcPts val="0"/>
+              </a:spcBef>
+              <a:spcAft>
+                <a:spcPts val="0"/>
+              </a:spcAft>
+              <a:defRPr sz="1000" b="0">
+                <a:solidFill>
+                  <a:srgbClr val="D0002B"/>
+                </a:solidFill>
+                <a:latin typeface="Arial"/>
+              </a:defRPr>
+            </a:pPr>
+            <a:r>
+              <a:rPr sz="1000">
+                <a:solidFill>
+                  <a:srgbClr val="F7F8FC"/>
+                </a:solidFill>
+                <a:latin typeface="Arial"/>
+                <a:hlinkClick r:id="rId8"/>
+              </a:rPr>
+              <a:t>Play quiz</a:t>
+            </a:r>
+          </a:p>
+        </p:txBody>
+      </p:sp>
+      <p:sp>
+        <p:nvSpPr>
+          <p:cNvPr id="23" name="Quiz PDF W02-L09"/>
+          <p:cNvSpPr txBox="1"/>
+          <p:nvPr/>
+        </p:nvSpPr>
+        <p:spPr>
+          <a:xfrm>
+            <a:off x="7296912" y="6606540"/>
+            <a:ext cx="1005840" cy="210312"/>
+          </a:xfrm>
+          <a:prstGeom prst="rect">
+            <a:avLst/>
+          </a:prstGeom>
+          <a:noFill/>
+        </p:spPr>
+        <p:txBody>
+          <a:bodyPr wrap="square" lIns="0" rIns="0" tIns="0" bIns="0" anchor="t">
+            <a:normAutofit fontScale="100000" lnSpcReduction="0"/>
+          </a:bodyPr>
+          <a:lstStyle/>
+          <a:p>
+            <a:pPr>
+              <a:spcBef>
+                <a:spcPts val="0"/>
+              </a:spcBef>
+              <a:spcAft>
+                <a:spcPts val="0"/>
+              </a:spcAft>
+              <a:defRPr sz="1000" b="0">
+                <a:solidFill>
+                  <a:srgbClr val="D0002B"/>
+                </a:solidFill>
+                <a:latin typeface="Arial"/>
+              </a:defRPr>
+            </a:pPr>
+            <a:r>
+              <a:rPr sz="1000">
+                <a:solidFill>
+                  <a:srgbClr val="F7F8FC"/>
+                </a:solidFill>
+                <a:latin typeface="Arial"/>
+                <a:hlinkClick r:id="rId9"/>
+              </a:rPr>
+              <a:t>Quiz PDF</a:t>
+            </a:r>
+          </a:p>
+        </p:txBody>
+      </p:sp>
     </p:spTree>
   </p:cSld>
   <p:clrMapOvr>
@@ -31552,6 +31650,104 @@
                 <a:latin typeface="Arial"/>
               </a:rPr>
               <a:t>Day 07  •  2026-11-06  •  37</a:t>
+            </a:r>
+          </a:p>
+        </p:txBody>
+      </p:sp>
+      <p:sp>
+        <p:nvSpPr>
+          <p:cNvPr id="22" name="Play quiz W02-L10"/>
+          <p:cNvSpPr txBox="1"/>
+          <p:nvPr/>
+        </p:nvSpPr>
+        <p:spPr>
+          <a:xfrm>
+            <a:off x="6355080" y="6606540"/>
+            <a:ext cx="822960" cy="210312"/>
+          </a:xfrm>
+          <a:prstGeom prst="rect">
+            <a:avLst/>
+          </a:prstGeom>
+          <a:noFill/>
+        </p:spPr>
+        <p:txBody>
+          <a:bodyPr wrap="square" lIns="0" rIns="0" tIns="0" bIns="0" anchor="t">
+            <a:normAutofit fontScale="100000" lnSpcReduction="0"/>
+          </a:bodyPr>
+          <a:lstStyle/>
+          <a:p>
+            <a:pPr>
+              <a:spcBef>
+                <a:spcPts val="0"/>
+              </a:spcBef>
+              <a:spcAft>
+                <a:spcPts val="0"/>
+              </a:spcAft>
+              <a:defRPr sz="1000" b="0">
+                <a:solidFill>
+                  <a:srgbClr val="D0002B"/>
+                </a:solidFill>
+                <a:latin typeface="Arial"/>
+              </a:defRPr>
+            </a:pPr>
+            <a:r>
+              <a:rPr sz="1000">
+                <a:solidFill>
+                  <a:srgbClr val="F7F8FC"/>
+                </a:solidFill>
+                <a:latin typeface="Arial"/>
+                <a:hlinkClick r:id="rId8"/>
+              </a:rPr>
+              <a:t>Play quiz</a:t>
+            </a:r>
+          </a:p>
+        </p:txBody>
+      </p:sp>
+      <p:sp>
+        <p:nvSpPr>
+          <p:cNvPr id="23" name="Quiz PDF W02-L10"/>
+          <p:cNvSpPr txBox="1"/>
+          <p:nvPr/>
+        </p:nvSpPr>
+        <p:spPr>
+          <a:xfrm>
+            <a:off x="7296912" y="6606540"/>
+            <a:ext cx="1005840" cy="210312"/>
+          </a:xfrm>
+          <a:prstGeom prst="rect">
+            <a:avLst/>
+          </a:prstGeom>
+          <a:noFill/>
+        </p:spPr>
+        <p:txBody>
+          <a:bodyPr wrap="square" lIns="0" rIns="0" tIns="0" bIns="0" anchor="t">
+            <a:normAutofit fontScale="100000" lnSpcReduction="0"/>
+          </a:bodyPr>
+          <a:lstStyle/>
+          <a:p>
+            <a:pPr>
+              <a:spcBef>
+                <a:spcPts val="0"/>
+              </a:spcBef>
+              <a:spcAft>
+                <a:spcPts val="0"/>
+              </a:spcAft>
+              <a:defRPr sz="1000" b="0">
+                <a:solidFill>
+                  <a:srgbClr val="D0002B"/>
+                </a:solidFill>
+                <a:latin typeface="Arial"/>
+              </a:defRPr>
+            </a:pPr>
+            <a:r>
+              <a:rPr sz="1000">
+                <a:solidFill>
+                  <a:srgbClr val="F7F8FC"/>
+                </a:solidFill>
+                <a:latin typeface="Arial"/>
+                <a:hlinkClick r:id="rId9"/>
+              </a:rPr>
+              <a:t>Quiz PDF</a:t>
             </a:r>
           </a:p>
         </p:txBody>
